--- a/@Materi Kuliah/Materi_Komputasi_Statistik_dan_Optimasi/Presentasi_Komputasi_Statistik_dan_Optimasi_Profesional_dari_HTML.pptx
+++ b/@Materi Kuliah/Materi_Komputasi_Statistik_dan_Optimasi/Presentasi_Komputasi_Statistik_dan_Optimasi_Profesional_dari_HTML.pptx
@@ -2,131 +2,36 @@
 <file path=ppt/presentation.xml><?xml version="1.0" encoding="utf-8"?>
 <p:presentation xmlns:p="http://schemas.openxmlformats.org/presentationml/2006/main">
   <p:sldMasterIdLst>
-    <p:sldMasterId xmlns:r="http://schemas.openxmlformats.org/officeDocument/2006/relationships" id="2147483648" r:id="Rd89a6b939d8f4847"/>
+    <p:sldMasterId xmlns:r="http://schemas.openxmlformats.org/officeDocument/2006/relationships" id="2147483648" r:id="R7d8c72a8a6964c3d"/>
   </p:sldMasterIdLst>
   <p:notesMasterIdLst>
-    <p:notesMasterId xmlns:r="http://schemas.openxmlformats.org/officeDocument/2006/relationships" r:id="Rda1976f8532a4848"/>
+    <p:notesMasterId xmlns:r="http://schemas.openxmlformats.org/officeDocument/2006/relationships" r:id="Rb7853b9c74ae43b0"/>
   </p:notesMasterIdLst>
   <p:sldIdLst>
-    <p:sldId xmlns:r="http://schemas.openxmlformats.org/officeDocument/2006/relationships" id="256" r:id="R951076a52e8b49cf"/>
-    <p:sldId xmlns:r="http://schemas.openxmlformats.org/officeDocument/2006/relationships" id="257" r:id="R7163f19769094a2c"/>
-    <p:sldId xmlns:r="http://schemas.openxmlformats.org/officeDocument/2006/relationships" id="258" r:id="R3685cdf0c7b64c61"/>
-    <p:sldId xmlns:r="http://schemas.openxmlformats.org/officeDocument/2006/relationships" id="259" r:id="R9d6bb13f751143c6"/>
-    <p:sldId xmlns:r="http://schemas.openxmlformats.org/officeDocument/2006/relationships" id="260" r:id="R51c6afad98554037"/>
-    <p:sldId xmlns:r="http://schemas.openxmlformats.org/officeDocument/2006/relationships" id="261" r:id="Rb53ca1dc41e54252"/>
-    <p:sldId xmlns:r="http://schemas.openxmlformats.org/officeDocument/2006/relationships" id="262" r:id="R58f88d5f70d9469f"/>
-    <p:sldId xmlns:r="http://schemas.openxmlformats.org/officeDocument/2006/relationships" id="263" r:id="R5ba2aff9ce4c4a19"/>
-    <p:sldId xmlns:r="http://schemas.openxmlformats.org/officeDocument/2006/relationships" id="264" r:id="R5f898255efc54ace"/>
-    <p:sldId xmlns:r="http://schemas.openxmlformats.org/officeDocument/2006/relationships" id="265" r:id="Rab448fdc1f344edc"/>
-    <p:sldId xmlns:r="http://schemas.openxmlformats.org/officeDocument/2006/relationships" id="266" r:id="R4051da39bf124d75"/>
-    <p:sldId xmlns:r="http://schemas.openxmlformats.org/officeDocument/2006/relationships" id="267" r:id="Racc0d5bea05c488b"/>
-    <p:sldId xmlns:r="http://schemas.openxmlformats.org/officeDocument/2006/relationships" id="268" r:id="Rd6eb76ddf91a4b5a"/>
-    <p:sldId xmlns:r="http://schemas.openxmlformats.org/officeDocument/2006/relationships" id="269" r:id="Re50a8bdf369e425b"/>
-    <p:sldId xmlns:r="http://schemas.openxmlformats.org/officeDocument/2006/relationships" id="270" r:id="R96ce387e9d334edb"/>
-    <p:sldId xmlns:r="http://schemas.openxmlformats.org/officeDocument/2006/relationships" id="271" r:id="R6b13bddbe31047db"/>
-    <p:sldId xmlns:r="http://schemas.openxmlformats.org/officeDocument/2006/relationships" id="272" r:id="R1bd07fae5fdf40f0"/>
-    <p:sldId xmlns:r="http://schemas.openxmlformats.org/officeDocument/2006/relationships" id="273" r:id="Rb604051a47104893"/>
-    <p:sldId xmlns:r="http://schemas.openxmlformats.org/officeDocument/2006/relationships" id="274" r:id="R17fafa6a7c1948e2"/>
-    <p:sldId xmlns:r="http://schemas.openxmlformats.org/officeDocument/2006/relationships" id="275" r:id="R2edb6224fbeb41af"/>
-    <p:sldId xmlns:r="http://schemas.openxmlformats.org/officeDocument/2006/relationships" id="276" r:id="R4d167a11bfa34c93"/>
+    <p:sldId xmlns:r="http://schemas.openxmlformats.org/officeDocument/2006/relationships" id="256" r:id="R8262aa323f5940f0"/>
+    <p:sldId xmlns:r="http://schemas.openxmlformats.org/officeDocument/2006/relationships" id="257" r:id="R4c4f728125054d7b"/>
+    <p:sldId xmlns:r="http://schemas.openxmlformats.org/officeDocument/2006/relationships" id="258" r:id="Rd52b81815e584943"/>
+    <p:sldId xmlns:r="http://schemas.openxmlformats.org/officeDocument/2006/relationships" id="259" r:id="R3e0b26449bad4bac"/>
+    <p:sldId xmlns:r="http://schemas.openxmlformats.org/officeDocument/2006/relationships" id="260" r:id="Rbc60ba45a5a7440f"/>
+    <p:sldId xmlns:r="http://schemas.openxmlformats.org/officeDocument/2006/relationships" id="261" r:id="R525f58b17a6f42f2"/>
+    <p:sldId xmlns:r="http://schemas.openxmlformats.org/officeDocument/2006/relationships" id="262" r:id="R0c404dcd03bc4890"/>
+    <p:sldId xmlns:r="http://schemas.openxmlformats.org/officeDocument/2006/relationships" id="263" r:id="Rdc9f00ca97f34f1c"/>
+    <p:sldId xmlns:r="http://schemas.openxmlformats.org/officeDocument/2006/relationships" id="264" r:id="Rdc189dafa36e4468"/>
+    <p:sldId xmlns:r="http://schemas.openxmlformats.org/officeDocument/2006/relationships" id="265" r:id="Rf125832e0a3f4304"/>
+    <p:sldId xmlns:r="http://schemas.openxmlformats.org/officeDocument/2006/relationships" id="266" r:id="Rc839d01a03654447"/>
+    <p:sldId xmlns:r="http://schemas.openxmlformats.org/officeDocument/2006/relationships" id="267" r:id="Rac7fc915d4da44da"/>
+    <p:sldId xmlns:r="http://schemas.openxmlformats.org/officeDocument/2006/relationships" id="268" r:id="Rf9659fd747364142"/>
+    <p:sldId xmlns:r="http://schemas.openxmlformats.org/officeDocument/2006/relationships" id="269" r:id="R87bde7cce2cc4da6"/>
+    <p:sldId xmlns:r="http://schemas.openxmlformats.org/officeDocument/2006/relationships" id="270" r:id="R73133ba42cde4c6f"/>
+    <p:sldId xmlns:r="http://schemas.openxmlformats.org/officeDocument/2006/relationships" id="271" r:id="R690a2baec8dc4a12"/>
+    <p:sldId xmlns:r="http://schemas.openxmlformats.org/officeDocument/2006/relationships" id="272" r:id="Ra80998e98a72499b"/>
+    <p:sldId xmlns:r="http://schemas.openxmlformats.org/officeDocument/2006/relationships" id="273" r:id="Rd7938ab302a74c88"/>
+    <p:sldId xmlns:r="http://schemas.openxmlformats.org/officeDocument/2006/relationships" id="274" r:id="R3c5fb423cfb540af"/>
+    <p:sldId xmlns:r="http://schemas.openxmlformats.org/officeDocument/2006/relationships" id="275" r:id="R77ed04778cce4a59"/>
+    <p:sldId xmlns:r="http://schemas.openxmlformats.org/officeDocument/2006/relationships" id="276" r:id="R8de45ffc36e84502"/>
   </p:sldIdLst>
   <p:sldSz cx="12192000" cy="6858000"/>
   <p:notesSz cx="6858000" cy="9144000"/>
-  <p:defaultTextStyle>
-    <a:defPPr xmlns:a="http://schemas.openxmlformats.org/drawingml/2006/main">
-      <a:defRPr lang="en-US"/>
-    </a:defPPr>
-    <a:lvl1pPr xmlns:a="http://schemas.openxmlformats.org/drawingml/2006/main" marL="0" indent="0" algn="l" defTabSz="914400">
-      <a:defRPr sz="1800" kern="1200">
-        <a:solidFill>
-          <a:schemeClr val="tx1"/>
-        </a:solidFill>
-        <a:latin typeface="+mn-lt"/>
-        <a:ea typeface="+mn-ea"/>
-        <a:cs typeface="+mn-cs"/>
-      </a:defRPr>
-    </a:lvl1pPr>
-    <a:lvl2pPr xmlns:a="http://schemas.openxmlformats.org/drawingml/2006/main" marL="457200" indent="0" algn="l" defTabSz="914400">
-      <a:defRPr sz="1800" kern="1200">
-        <a:solidFill>
-          <a:schemeClr val="tx1"/>
-        </a:solidFill>
-        <a:latin typeface="+mn-lt"/>
-        <a:ea typeface="+mn-ea"/>
-        <a:cs typeface="+mn-cs"/>
-      </a:defRPr>
-    </a:lvl2pPr>
-    <a:lvl3pPr xmlns:a="http://schemas.openxmlformats.org/drawingml/2006/main" marL="914400" indent="0" algn="l" defTabSz="914400">
-      <a:defRPr sz="1800" kern="1200">
-        <a:solidFill>
-          <a:schemeClr val="tx1"/>
-        </a:solidFill>
-        <a:latin typeface="+mn-lt"/>
-        <a:ea typeface="+mn-ea"/>
-        <a:cs typeface="+mn-cs"/>
-      </a:defRPr>
-    </a:lvl3pPr>
-    <a:lvl4pPr xmlns:a="http://schemas.openxmlformats.org/drawingml/2006/main" marL="1371600" indent="0" algn="l" defTabSz="914400">
-      <a:defRPr sz="1800" kern="1200">
-        <a:solidFill>
-          <a:schemeClr val="tx1"/>
-        </a:solidFill>
-        <a:latin typeface="+mn-lt"/>
-        <a:ea typeface="+mn-ea"/>
-        <a:cs typeface="+mn-cs"/>
-      </a:defRPr>
-    </a:lvl4pPr>
-    <a:lvl5pPr xmlns:a="http://schemas.openxmlformats.org/drawingml/2006/main" marL="1828800" indent="0" algn="l" defTabSz="914400">
-      <a:defRPr sz="1800" kern="1200">
-        <a:solidFill>
-          <a:schemeClr val="tx1"/>
-        </a:solidFill>
-        <a:latin typeface="+mn-lt"/>
-        <a:ea typeface="+mn-ea"/>
-        <a:cs typeface="+mn-cs"/>
-      </a:defRPr>
-    </a:lvl5pPr>
-    <a:lvl6pPr xmlns:a="http://schemas.openxmlformats.org/drawingml/2006/main" marL="2286000" indent="0" algn="l" defTabSz="914400">
-      <a:defRPr sz="1800" kern="1200">
-        <a:solidFill>
-          <a:schemeClr val="tx1"/>
-        </a:solidFill>
-        <a:latin typeface="+mn-lt"/>
-        <a:ea typeface="+mn-ea"/>
-        <a:cs typeface="+mn-cs"/>
-      </a:defRPr>
-    </a:lvl6pPr>
-    <a:lvl7pPr xmlns:a="http://schemas.openxmlformats.org/drawingml/2006/main" marL="2743200" indent="0" algn="l" defTabSz="914400">
-      <a:defRPr sz="1800" kern="1200">
-        <a:solidFill>
-          <a:schemeClr val="tx1"/>
-        </a:solidFill>
-        <a:latin typeface="+mn-lt"/>
-        <a:ea typeface="+mn-ea"/>
-        <a:cs typeface="+mn-cs"/>
-      </a:defRPr>
-    </a:lvl7pPr>
-    <a:lvl8pPr xmlns:a="http://schemas.openxmlformats.org/drawingml/2006/main" marL="3200400" indent="0" algn="l" defTabSz="914400">
-      <a:defRPr sz="1800" kern="1200">
-        <a:solidFill>
-          <a:schemeClr val="tx1"/>
-        </a:solidFill>
-        <a:latin typeface="+mn-lt"/>
-        <a:ea typeface="+mn-ea"/>
-        <a:cs typeface="+mn-cs"/>
-      </a:defRPr>
-    </a:lvl8pPr>
-    <a:lvl9pPr xmlns:a="http://schemas.openxmlformats.org/drawingml/2006/main" marL="3657600" indent="0" algn="l" defTabSz="914400">
-      <a:defRPr sz="1800" kern="1200">
-        <a:solidFill>
-          <a:schemeClr val="tx1"/>
-        </a:solidFill>
-        <a:latin typeface="+mn-lt"/>
-        <a:ea typeface="+mn-ea"/>
-        <a:cs typeface="+mn-cs"/>
-      </a:defRPr>
-    </a:lvl9pPr>
-  </p:defaultTextStyle>
 </p:presentation>
 </file>
 
@@ -1453,7 +1358,26 @@
         <p:txBody>
           <a:bodyPr xmlns:a="http://schemas.openxmlformats.org/drawingml/2006/main"/>
           <a:lstStyle xmlns:a="http://schemas.openxmlformats.org/drawingml/2006/main"/>
-          <a:p xmlns:a="http://schemas.openxmlformats.org/drawingml/2006/main"/>
+          <a:p xmlns:a="http://schemas.openxmlformats.org/drawingml/2006/main">
+            <a:r>
+              <a:t>[Sources]</a:t>
+            </a:r>
+          </a:p>
+          <a:p xmlns:a="http://schemas.openxmlformats.org/drawingml/2006/main">
+            <a:r>
+              <a:t>- RPS mata kuliah Revisi AI 2026, Program Studi S2 Statistika Terapan FMIPA Universitas Padjadjaran.</a:t>
+            </a:r>
+          </a:p>
+          <a:p xmlns:a="http://schemas.openxmlformats.org/drawingml/2006/main">
+            <a:r>
+              <a:t>[/Sources]</a:t>
+            </a:r>
+          </a:p>
+          <a:p xmlns:a="http://schemas.openxmlformats.org/drawingml/2006/main">
+            <a:r>
+              <a:t>Penutup: CPL tetap. AI adalah akselerator ketercapaian CPMK/Sub-CPMK, bukan pengganti penalaran statistika. Tekankan kewajiban prompt log ringkas, sumber, kode/notebook reproducible, validasi, dan audit trail.</a:t>
+            </a:r>
+          </a:p>
         </p:txBody>
       </p:sp>
       <p:sp>
@@ -2010,8 +1934,8 @@
   </p:cSld>
   <p:clrMap bg1="lt1" tx1="dk1" bg2="lt2" tx2="dk2" accent1="accent1" accent2="accent2" accent3="accent3" accent4="accent4" accent5="accent5" accent6="accent6" hlink="hlink" folHlink="folHlink"/>
   <p:sldLayoutIdLst>
-    <p:sldLayoutId xmlns:r="http://schemas.openxmlformats.org/officeDocument/2006/relationships" id="2147483649" r:id="R667ed40d6cf246e1"/>
-    <p:sldLayoutId xmlns:r="http://schemas.openxmlformats.org/officeDocument/2006/relationships" id="2147483650" r:id="R578bb97eee034673"/>
+    <p:sldLayoutId xmlns:r="http://schemas.openxmlformats.org/officeDocument/2006/relationships" id="2147483649" r:id="R6d295a796f03495d"/>
+    <p:sldLayoutId xmlns:r="http://schemas.openxmlformats.org/officeDocument/2006/relationships" id="2147483650" r:id="Re98ed5147a7c4538"/>
   </p:sldLayoutIdLst>
   <p:hf sldNum="0" hdr="0" ftr="0" dt="0"/>
   <p:txStyles>
@@ -2577,7 +2501,7 @@
           <p:nvPr/>
         </p:nvPicPr>
         <p:blipFill>
-          <a:blip xmlns:r="http://schemas.openxmlformats.org/officeDocument/2006/relationships" xmlns:a="http://schemas.openxmlformats.org/drawingml/2006/main" r:embed="Rb8c0da086c9e4a80"/>
+          <a:blip xmlns:r="http://schemas.openxmlformats.org/officeDocument/2006/relationships" xmlns:a="http://schemas.openxmlformats.org/drawingml/2006/main" r:embed="R55ec58385def4598"/>
           <a:stretch xmlns:a="http://schemas.openxmlformats.org/drawingml/2006/main">
             <a:fillRect l="0" t="0" r="0" b="0"/>
           </a:stretch>
@@ -2723,7 +2647,7 @@
           <p:nvPr/>
         </p:nvPicPr>
         <p:blipFill>
-          <a:blip xmlns:r="http://schemas.openxmlformats.org/officeDocument/2006/relationships" xmlns:a="http://schemas.openxmlformats.org/drawingml/2006/main" r:embed="R46bb83b5e8c44e4f"/>
+          <a:blip xmlns:r="http://schemas.openxmlformats.org/officeDocument/2006/relationships" xmlns:a="http://schemas.openxmlformats.org/drawingml/2006/main" r:embed="R772a9251ef0d4657"/>
           <a:stretch xmlns:a="http://schemas.openxmlformats.org/drawingml/2006/main">
             <a:fillRect l="0" t="0" r="0" b="0"/>
           </a:stretch>
@@ -3345,7 +3269,7 @@
           <p:nvPr/>
         </p:nvPicPr>
         <p:blipFill>
-          <a:blip xmlns:r="http://schemas.openxmlformats.org/officeDocument/2006/relationships" xmlns:a="http://schemas.openxmlformats.org/drawingml/2006/main" r:embed="R7075cd86055949c7"/>
+          <a:blip xmlns:r="http://schemas.openxmlformats.org/officeDocument/2006/relationships" xmlns:a="http://schemas.openxmlformats.org/drawingml/2006/main" r:embed="Rd724dde3d916405a"/>
           <a:stretch xmlns:a="http://schemas.openxmlformats.org/drawingml/2006/main">
             <a:fillRect l="0" t="0" r="0" b="0"/>
           </a:stretch>
@@ -5495,7 +5419,7 @@
           <p:nvPr/>
         </p:nvPicPr>
         <p:blipFill>
-          <a:blip xmlns:r="http://schemas.openxmlformats.org/officeDocument/2006/relationships" xmlns:a="http://schemas.openxmlformats.org/drawingml/2006/main" r:embed="Rf04432a916f04f42"/>
+          <a:blip xmlns:r="http://schemas.openxmlformats.org/officeDocument/2006/relationships" xmlns:a="http://schemas.openxmlformats.org/drawingml/2006/main" r:embed="R9bd54f61057f4f68"/>
           <a:stretch xmlns:a="http://schemas.openxmlformats.org/drawingml/2006/main">
             <a:fillRect l="0" t="0" r="0" b="0"/>
           </a:stretch>
@@ -5774,7 +5698,7 @@
           <p:nvPr/>
         </p:nvPicPr>
         <p:blipFill>
-          <a:blip xmlns:r="http://schemas.openxmlformats.org/officeDocument/2006/relationships" xmlns:a="http://schemas.openxmlformats.org/drawingml/2006/main" r:embed="Rf08211245a4c4921"/>
+          <a:blip xmlns:r="http://schemas.openxmlformats.org/officeDocument/2006/relationships" xmlns:a="http://schemas.openxmlformats.org/drawingml/2006/main" r:embed="R8746d0d74ffb4b6e"/>
           <a:stretch xmlns:a="http://schemas.openxmlformats.org/drawingml/2006/main">
             <a:fillRect l="0" t="0" r="0" b="0"/>
           </a:stretch>
@@ -7308,7 +7232,7 @@
           <p:nvPr/>
         </p:nvPicPr>
         <p:blipFill>
-          <a:blip xmlns:r="http://schemas.openxmlformats.org/officeDocument/2006/relationships" xmlns:a="http://schemas.openxmlformats.org/drawingml/2006/main" r:embed="R25215f8bce7647c2"/>
+          <a:blip xmlns:r="http://schemas.openxmlformats.org/officeDocument/2006/relationships" xmlns:a="http://schemas.openxmlformats.org/drawingml/2006/main" r:embed="R5ee44a474d4a44ac"/>
           <a:stretch xmlns:a="http://schemas.openxmlformats.org/drawingml/2006/main">
             <a:fillRect l="0" t="0" r="0" b="0"/>
           </a:stretch>
@@ -8477,7 +8401,7 @@
           <p:nvPr/>
         </p:nvPicPr>
         <p:blipFill>
-          <a:blip xmlns:r="http://schemas.openxmlformats.org/officeDocument/2006/relationships" xmlns:a="http://schemas.openxmlformats.org/drawingml/2006/main" r:embed="Rb36c0a8fb0584347"/>
+          <a:blip xmlns:r="http://schemas.openxmlformats.org/officeDocument/2006/relationships" xmlns:a="http://schemas.openxmlformats.org/drawingml/2006/main" r:embed="R8788b647acf745b6"/>
           <a:stretch xmlns:a="http://schemas.openxmlformats.org/drawingml/2006/main">
             <a:fillRect l="0" t="0" r="0" b="0"/>
           </a:stretch>
@@ -9704,7 +9628,7 @@
           <p:nvPr/>
         </p:nvPicPr>
         <p:blipFill>
-          <a:blip xmlns:r="http://schemas.openxmlformats.org/officeDocument/2006/relationships" xmlns:a="http://schemas.openxmlformats.org/drawingml/2006/main" r:embed="R38ffa310fc0f4a42"/>
+          <a:blip xmlns:r="http://schemas.openxmlformats.org/officeDocument/2006/relationships" xmlns:a="http://schemas.openxmlformats.org/drawingml/2006/main" r:embed="R792b0709af254cf5"/>
           <a:stretch xmlns:a="http://schemas.openxmlformats.org/drawingml/2006/main">
             <a:fillRect l="0" t="0" r="0" b="0"/>
           </a:stretch>
@@ -10909,7 +10833,7 @@
           <p:nvPr/>
         </p:nvPicPr>
         <p:blipFill>
-          <a:blip xmlns:r="http://schemas.openxmlformats.org/officeDocument/2006/relationships" xmlns:a="http://schemas.openxmlformats.org/drawingml/2006/main" r:embed="R0cc71927970c4474"/>
+          <a:blip xmlns:r="http://schemas.openxmlformats.org/officeDocument/2006/relationships" xmlns:a="http://schemas.openxmlformats.org/drawingml/2006/main" r:embed="Raf50bf2f30a2457c"/>
           <a:stretch xmlns:a="http://schemas.openxmlformats.org/drawingml/2006/main">
             <a:fillRect l="0" t="0" r="0" b="0"/>
           </a:stretch>
@@ -11188,7 +11112,7 @@
           <p:nvPr/>
         </p:nvPicPr>
         <p:blipFill>
-          <a:blip xmlns:r="http://schemas.openxmlformats.org/officeDocument/2006/relationships" xmlns:a="http://schemas.openxmlformats.org/drawingml/2006/main" r:embed="R5cac4d31114246ba"/>
+          <a:blip xmlns:r="http://schemas.openxmlformats.org/officeDocument/2006/relationships" xmlns:a="http://schemas.openxmlformats.org/drawingml/2006/main" r:embed="R9ec3a28b04904871"/>
           <a:stretch xmlns:a="http://schemas.openxmlformats.org/drawingml/2006/main">
             <a:fillRect l="0" t="0" r="0" b="0"/>
           </a:stretch>
@@ -12733,7 +12657,7 @@
           <p:nvPr/>
         </p:nvPicPr>
         <p:blipFill>
-          <a:blip xmlns:r="http://schemas.openxmlformats.org/officeDocument/2006/relationships" xmlns:a="http://schemas.openxmlformats.org/drawingml/2006/main" r:embed="Rfc69cfee239d4e70"/>
+          <a:blip xmlns:r="http://schemas.openxmlformats.org/officeDocument/2006/relationships" xmlns:a="http://schemas.openxmlformats.org/drawingml/2006/main" r:embed="R690ed7fb1eea41aa"/>
           <a:stretch xmlns:a="http://schemas.openxmlformats.org/drawingml/2006/main">
             <a:fillRect l="0" t="0" r="0" b="0"/>
           </a:stretch>
@@ -14750,7 +14674,7 @@
           <p:nvPr/>
         </p:nvPicPr>
         <p:blipFill>
-          <a:blip xmlns:r="http://schemas.openxmlformats.org/officeDocument/2006/relationships" xmlns:a="http://schemas.openxmlformats.org/drawingml/2006/main" r:embed="R265d0666c09c4b46"/>
+          <a:blip xmlns:r="http://schemas.openxmlformats.org/officeDocument/2006/relationships" xmlns:a="http://schemas.openxmlformats.org/drawingml/2006/main" r:embed="Ra3bfdefdc96e412f"/>
           <a:stretch xmlns:a="http://schemas.openxmlformats.org/drawingml/2006/main">
             <a:fillRect l="0" t="0" r="0" b="0"/>
           </a:stretch>
@@ -15977,7 +15901,7 @@
           <p:nvPr/>
         </p:nvPicPr>
         <p:blipFill>
-          <a:blip xmlns:r="http://schemas.openxmlformats.org/officeDocument/2006/relationships" xmlns:a="http://schemas.openxmlformats.org/drawingml/2006/main" r:embed="Re1ad7945e8cb472a"/>
+          <a:blip xmlns:r="http://schemas.openxmlformats.org/officeDocument/2006/relationships" xmlns:a="http://schemas.openxmlformats.org/drawingml/2006/main" r:embed="Rb8b42fd5ae2b4534"/>
           <a:stretch xmlns:a="http://schemas.openxmlformats.org/drawingml/2006/main">
             <a:fillRect l="0" t="0" r="0" b="0"/>
           </a:stretch>
@@ -17118,7 +17042,7 @@
           <p:nvPr/>
         </p:nvPicPr>
         <p:blipFill>
-          <a:blip xmlns:r="http://schemas.openxmlformats.org/officeDocument/2006/relationships" xmlns:a="http://schemas.openxmlformats.org/drawingml/2006/main" r:embed="R32df8489c0d7421d"/>
+          <a:blip xmlns:r="http://schemas.openxmlformats.org/officeDocument/2006/relationships" xmlns:a="http://schemas.openxmlformats.org/drawingml/2006/main" r:embed="R7c5378d283704c1f"/>
           <a:stretch xmlns:a="http://schemas.openxmlformats.org/drawingml/2006/main">
             <a:fillRect l="0" t="0" r="0" b="0"/>
           </a:stretch>
@@ -18583,7 +18507,7 @@
           <p:nvPr/>
         </p:nvPicPr>
         <p:blipFill>
-          <a:blip xmlns:r="http://schemas.openxmlformats.org/officeDocument/2006/relationships" xmlns:a="http://schemas.openxmlformats.org/drawingml/2006/main" r:embed="Rd682b2af639144f9"/>
+          <a:blip xmlns:r="http://schemas.openxmlformats.org/officeDocument/2006/relationships" xmlns:a="http://schemas.openxmlformats.org/drawingml/2006/main" r:embed="R26419af67d9a4158"/>
           <a:stretch xmlns:a="http://schemas.openxmlformats.org/drawingml/2006/main">
             <a:fillRect l="0" t="0" r="0" b="0"/>
           </a:stretch>
@@ -18729,7 +18653,7 @@
           <p:nvPr/>
         </p:nvPicPr>
         <p:blipFill>
-          <a:blip xmlns:r="http://schemas.openxmlformats.org/officeDocument/2006/relationships" xmlns:a="http://schemas.openxmlformats.org/drawingml/2006/main" r:embed="Rde21260bbe984875"/>
+          <a:blip xmlns:r="http://schemas.openxmlformats.org/officeDocument/2006/relationships" xmlns:a="http://schemas.openxmlformats.org/drawingml/2006/main" r:embed="R7dc80190d7054ffd"/>
           <a:stretch xmlns:a="http://schemas.openxmlformats.org/drawingml/2006/main">
             <a:fillRect l="0" t="0" r="0" b="0"/>
           </a:stretch>
@@ -18833,7 +18757,7 @@
                 <a:ea typeface="Aptos Display"/>
                 <a:cs typeface="Aptos Display"/>
               </a:rPr>
-              <a:t>Dari data menuju</a:t>
+              <a:t>AI mempercepat proses,</a:t>
             </a:r>
           </a:p>
           <a:p xmlns:a="http://schemas.openxmlformats.org/drawingml/2006/main">
@@ -18849,7 +18773,7 @@
                 <a:ea typeface="Aptos Display"/>
                 <a:cs typeface="Aptos Display"/>
               </a:rPr>
-              <a:t>keputusan yang dapat diuji</a:t>
+              <a:t>penalaran tetap memimpin</a:t>
             </a:r>
           </a:p>
         </p:txBody>
@@ -18916,7 +18840,7 @@
         </p:spPr>
         <p:txBody>
           <a:bodyPr xmlns:a="http://schemas.openxmlformats.org/drawingml/2006/main" wrap="square" lIns="635" tIns="635" rIns="635" bIns="635" anchor="t">
-            <a:normAutofit fontScale="100000"/>
+            <a:normAutofit fontScale="93620"/>
           </a:bodyPr>
           <a:lstStyle xmlns:a="http://schemas.openxmlformats.org/drawingml/2006/main"/>
           <a:p xmlns:a="http://schemas.openxmlformats.org/drawingml/2006/main">
@@ -18932,7 +18856,7 @@
                 <a:ea typeface="Aptos"/>
                 <a:cs typeface="Aptos"/>
               </a:rPr>
-              <a:t>Komputasi &amp; Optimasi menghubungkan teori, data, metode, validasi, dan komunikasi untuk menghasilkan keputusan yang sahih, dapat direplikasi, dan bertanggung jawab.</a:t>
+              <a:t>Komputasi Statistik dan Optimasi memadukan teori, data, komputasi, validasi, dan komunikasi. AI mempercepat eksplorasi dan pemeriksaan awal; mahasiswa tetap memverifikasi asumsi, kode, hasil numerik, ketidakpastian, sumber, dan dampak sebelum mengambil keputusan.</a:t>
             </a:r>
           </a:p>
         </p:txBody>
@@ -19102,7 +19026,7 @@
           <p:nvPr/>
         </p:nvPicPr>
         <p:blipFill>
-          <a:blip xmlns:r="http://schemas.openxmlformats.org/officeDocument/2006/relationships" xmlns:a="http://schemas.openxmlformats.org/drawingml/2006/main" r:embed="Ra20b5d2dc26e43c7"/>
+          <a:blip xmlns:r="http://schemas.openxmlformats.org/officeDocument/2006/relationships" xmlns:a="http://schemas.openxmlformats.org/drawingml/2006/main" r:embed="R60d57aa49aea4d01"/>
           <a:stretch xmlns:a="http://schemas.openxmlformats.org/drawingml/2006/main">
             <a:fillRect l="0" t="0" r="0" b="0"/>
           </a:stretch>
@@ -20233,7 +20157,7 @@
           <p:nvPr/>
         </p:nvPicPr>
         <p:blipFill>
-          <a:blip xmlns:r="http://schemas.openxmlformats.org/officeDocument/2006/relationships" xmlns:a="http://schemas.openxmlformats.org/drawingml/2006/main" r:embed="R926769e1672e46ff"/>
+          <a:blip xmlns:r="http://schemas.openxmlformats.org/officeDocument/2006/relationships" xmlns:a="http://schemas.openxmlformats.org/drawingml/2006/main" r:embed="Rd985012cda7c49ea"/>
           <a:stretch xmlns:a="http://schemas.openxmlformats.org/drawingml/2006/main">
             <a:fillRect l="0" t="0" r="0" b="0"/>
           </a:stretch>
@@ -22337,7 +22261,7 @@
           <p:nvPr/>
         </p:nvPicPr>
         <p:blipFill>
-          <a:blip xmlns:r="http://schemas.openxmlformats.org/officeDocument/2006/relationships" xmlns:a="http://schemas.openxmlformats.org/drawingml/2006/main" r:embed="R35ecc3826bda4182"/>
+          <a:blip xmlns:r="http://schemas.openxmlformats.org/officeDocument/2006/relationships" xmlns:a="http://schemas.openxmlformats.org/drawingml/2006/main" r:embed="R3fde41e4c45e4ef2"/>
           <a:stretch xmlns:a="http://schemas.openxmlformats.org/drawingml/2006/main">
             <a:fillRect l="0" t="0" r="0" b="0"/>
           </a:stretch>
@@ -23619,7 +23543,7 @@
           <p:nvPr/>
         </p:nvPicPr>
         <p:blipFill>
-          <a:blip xmlns:r="http://schemas.openxmlformats.org/officeDocument/2006/relationships" xmlns:a="http://schemas.openxmlformats.org/drawingml/2006/main" r:embed="R730a7ffb9136426a"/>
+          <a:blip xmlns:r="http://schemas.openxmlformats.org/officeDocument/2006/relationships" xmlns:a="http://schemas.openxmlformats.org/drawingml/2006/main" r:embed="Rf8c1b91ecc254cf0"/>
           <a:stretch xmlns:a="http://schemas.openxmlformats.org/drawingml/2006/main">
             <a:fillRect l="0" t="0" r="0" b="0"/>
           </a:stretch>
@@ -23898,7 +23822,7 @@
           <p:nvPr/>
         </p:nvPicPr>
         <p:blipFill>
-          <a:blip xmlns:r="http://schemas.openxmlformats.org/officeDocument/2006/relationships" xmlns:a="http://schemas.openxmlformats.org/drawingml/2006/main" r:embed="R308c239b384841b3"/>
+          <a:blip xmlns:r="http://schemas.openxmlformats.org/officeDocument/2006/relationships" xmlns:a="http://schemas.openxmlformats.org/drawingml/2006/main" r:embed="R9ca1a76f1acf4bd6"/>
           <a:stretch xmlns:a="http://schemas.openxmlformats.org/drawingml/2006/main">
             <a:fillRect l="0" t="0" r="0" b="0"/>
           </a:stretch>
@@ -25978,7 +25902,7 @@
           <p:nvPr/>
         </p:nvPicPr>
         <p:blipFill>
-          <a:blip xmlns:r="http://schemas.openxmlformats.org/officeDocument/2006/relationships" xmlns:a="http://schemas.openxmlformats.org/drawingml/2006/main" r:embed="Rf47720d52113406a"/>
+          <a:blip xmlns:r="http://schemas.openxmlformats.org/officeDocument/2006/relationships" xmlns:a="http://schemas.openxmlformats.org/drawingml/2006/main" r:embed="R5379ed2f156949d9"/>
           <a:stretch xmlns:a="http://schemas.openxmlformats.org/drawingml/2006/main">
             <a:fillRect l="0" t="0" r="0" b="0"/>
           </a:stretch>
@@ -27391,7 +27315,7 @@
           <p:nvPr/>
         </p:nvPicPr>
         <p:blipFill>
-          <a:blip xmlns:r="http://schemas.openxmlformats.org/officeDocument/2006/relationships" xmlns:a="http://schemas.openxmlformats.org/drawingml/2006/main" r:embed="R4393cf2782c244f8"/>
+          <a:blip xmlns:r="http://schemas.openxmlformats.org/officeDocument/2006/relationships" xmlns:a="http://schemas.openxmlformats.org/drawingml/2006/main" r:embed="Rd6c6c4ead90648c0"/>
           <a:stretch xmlns:a="http://schemas.openxmlformats.org/drawingml/2006/main">
             <a:fillRect l="0" t="0" r="0" b="0"/>
           </a:stretch>
